--- a/presentation/MCP-Assistant-Presentation.pptx
+++ b/presentation/MCP-Assistant-Presentation.pptx
@@ -8174,7 +8174,7 @@
                 <a:ea typeface="Arial" pitchFamily="34" charset="-122"/>
                 <a:cs typeface="Arial" pitchFamily="34" charset="-120"/>
               </a:rPr>
-              <a:t>7</a:t>
+              <a:t>8</a:t>
             </a:r>
             <a:endParaRPr lang="en-US" sz="2600" dirty="0"/>
           </a:p>
